--- a/CS3342_Presentation.pptx
+++ b/CS3342_Presentation.pptx
@@ -8441,13 +8441,13 @@
       </p:sp>
       <p:sp>
         <p:nvSpPr>
-          <p:cNvPr id="22" name="Oval 21"/>
+          <p:cNvPr id="26" name="Oval 25"/>
           <p:cNvSpPr/>
           <p:nvPr/>
         </p:nvSpPr>
         <p:spPr>
           <a:xfrm>
-            <a:off x="914400" y="4160520"/>
+            <a:off x="914400" y="4158488"/>
             <a:ext cx="365760" cy="365760"/>
           </a:xfrm>
           <a:prstGeom prst="ellipse">
@@ -8485,13 +8485,13 @@
       </p:sp>
       <p:sp>
         <p:nvSpPr>
-          <p:cNvPr id="23" name="TextBox 22"/>
+          <p:cNvPr id="27" name="TextBox 26"/>
           <p:cNvSpPr txBox="1"/>
           <p:nvPr/>
         </p:nvSpPr>
         <p:spPr>
           <a:xfrm>
-            <a:off x="914400" y="4178808"/>
+            <a:off x="914400" y="4176776"/>
             <a:ext cx="365760" cy="320040"/>
           </a:xfrm>
           <a:prstGeom prst="rect">
@@ -8521,13 +8521,13 @@
       </p:sp>
       <p:sp>
         <p:nvSpPr>
-          <p:cNvPr id="24" name="TextBox 23"/>
+          <p:cNvPr id="28" name="TextBox 27"/>
           <p:cNvSpPr txBox="1"/>
           <p:nvPr/>
         </p:nvSpPr>
         <p:spPr>
           <a:xfrm>
-            <a:off x="1463040" y="4114800"/>
+            <a:off x="1463040" y="4112768"/>
             <a:ext cx="3200400" cy="365760"/>
           </a:xfrm>
           <a:prstGeom prst="rect">
@@ -8550,20 +8550,20 @@
               </a:defRPr>
             </a:pPr>
             <a:r>
-              <a:t>Full Documentation</a:t>
-            </a:r>
-          </a:p>
-        </p:txBody>
-      </p:sp>
-      <p:sp>
-        <p:nvSpPr>
-          <p:cNvPr id="25" name="TextBox 24"/>
+              <a:t>Production-ready CLI</a:t>
+            </a:r>
+          </a:p>
+        </p:txBody>
+      </p:sp>
+      <p:sp>
+        <p:nvSpPr>
+          <p:cNvPr id="29" name="TextBox 28"/>
           <p:cNvSpPr txBox="1"/>
           <p:nvPr/>
         </p:nvSpPr>
         <p:spPr>
           <a:xfrm>
-            <a:off x="4754880" y="4142232"/>
+            <a:off x="4754880" y="4140200"/>
             <a:ext cx="6400800" cy="365760"/>
           </a:xfrm>
           <a:prstGeom prst="rect">
@@ -8586,158 +8586,6 @@
               </a:defRPr>
             </a:pPr>
             <a:r>
-              <a:t>README, User Manual, Installation Guide</a:t>
-            </a:r>
-          </a:p>
-        </p:txBody>
-      </p:sp>
-      <p:sp>
-        <p:nvSpPr>
-          <p:cNvPr id="26" name="Oval 25"/>
-          <p:cNvSpPr/>
-          <p:nvPr/>
-        </p:nvSpPr>
-        <p:spPr>
-          <a:xfrm>
-            <a:off x="914400" y="4846320"/>
-            <a:ext cx="365760" cy="365760"/>
-          </a:xfrm>
-          <a:prstGeom prst="ellipse">
-            <a:avLst/>
-          </a:prstGeom>
-          <a:solidFill>
-            <a:srgbClr val="4A80A0"/>
-          </a:solidFill>
-          <a:ln>
-            <a:noFill/>
-          </a:ln>
-        </p:spPr>
-        <p:style>
-          <a:lnRef idx="1">
-            <a:schemeClr val="accent1"/>
-          </a:lnRef>
-          <a:fillRef idx="3">
-            <a:schemeClr val="accent1"/>
-          </a:fillRef>
-          <a:effectRef idx="2">
-            <a:schemeClr val="accent1"/>
-          </a:effectRef>
-          <a:fontRef idx="minor">
-            <a:schemeClr val="lt1"/>
-          </a:fontRef>
-        </p:style>
-        <p:txBody>
-          <a:bodyPr rtlCol="0" anchor="ctr"/>
-          <a:lstStyle/>
-          <a:p>
-            <a:pPr algn="ctr"/>
-            <a:endParaRPr/>
-          </a:p>
-        </p:txBody>
-      </p:sp>
-      <p:sp>
-        <p:nvSpPr>
-          <p:cNvPr id="27" name="TextBox 26"/>
-          <p:cNvSpPr txBox="1"/>
-          <p:nvPr/>
-        </p:nvSpPr>
-        <p:spPr>
-          <a:xfrm>
-            <a:off x="914400" y="4864608"/>
-            <a:ext cx="365760" cy="320040"/>
-          </a:xfrm>
-          <a:prstGeom prst="rect">
-            <a:avLst/>
-          </a:prstGeom>
-          <a:noFill/>
-        </p:spPr>
-        <p:txBody>
-          <a:bodyPr wrap="square">
-            <a:spAutoFit/>
-          </a:bodyPr>
-          <a:lstStyle/>
-          <a:p>
-            <a:pPr algn="ctr">
-              <a:defRPr sz="1600" b="1">
-                <a:solidFill>
-                  <a:srgbClr val="FFFFFF"/>
-                </a:solidFill>
-                <a:latin typeface="Calibri"/>
-              </a:defRPr>
-            </a:pPr>
-            <a:r>
-              <a:t>✓</a:t>
-            </a:r>
-          </a:p>
-        </p:txBody>
-      </p:sp>
-      <p:sp>
-        <p:nvSpPr>
-          <p:cNvPr id="28" name="TextBox 27"/>
-          <p:cNvSpPr txBox="1"/>
-          <p:nvPr/>
-        </p:nvSpPr>
-        <p:spPr>
-          <a:xfrm>
-            <a:off x="1463040" y="4800600"/>
-            <a:ext cx="3200400" cy="365760"/>
-          </a:xfrm>
-          <a:prstGeom prst="rect">
-            <a:avLst/>
-          </a:prstGeom>
-          <a:noFill/>
-        </p:spPr>
-        <p:txBody>
-          <a:bodyPr wrap="square">
-            <a:spAutoFit/>
-          </a:bodyPr>
-          <a:lstStyle/>
-          <a:p>
-            <a:pPr algn="l">
-              <a:defRPr sz="1800" b="1">
-                <a:solidFill>
-                  <a:srgbClr val="A0D2CE"/>
-                </a:solidFill>
-                <a:latin typeface="Calibri"/>
-              </a:defRPr>
-            </a:pPr>
-            <a:r>
-              <a:t>Production-ready CLI</a:t>
-            </a:r>
-          </a:p>
-        </p:txBody>
-      </p:sp>
-      <p:sp>
-        <p:nvSpPr>
-          <p:cNvPr id="29" name="TextBox 28"/>
-          <p:cNvSpPr txBox="1"/>
-          <p:nvPr/>
-        </p:nvSpPr>
-        <p:spPr>
-          <a:xfrm>
-            <a:off x="4754880" y="4828032"/>
-            <a:ext cx="6400800" cy="365760"/>
-          </a:xfrm>
-          <a:prstGeom prst="rect">
-            <a:avLst/>
-          </a:prstGeom>
-          <a:noFill/>
-        </p:spPr>
-        <p:txBody>
-          <a:bodyPr wrap="square">
-            <a:spAutoFit/>
-          </a:bodyPr>
-          <a:lstStyle/>
-          <a:p>
-            <a:pPr algn="l">
-              <a:defRPr sz="1500" b="0">
-                <a:solidFill>
-                  <a:srgbClr val="E0EBEE"/>
-                </a:solidFill>
-                <a:latin typeface="Calibri"/>
-              </a:defRPr>
-            </a:pPr>
-            <a:r>
               <a:t>Fat JAR with Maven build, sample data, demo script</a:t>
             </a:r>
           </a:p>
@@ -8751,7 +8599,7 @@
         </p:nvSpPr>
         <p:spPr>
           <a:xfrm>
-            <a:off x="731520" y="5669280"/>
+            <a:off x="746760" y="5120641"/>
             <a:ext cx="10698480" cy="731520"/>
           </a:xfrm>
           <a:prstGeom prst="roundRect">
@@ -8797,7 +8645,7 @@
         </p:nvSpPr>
         <p:spPr>
           <a:xfrm>
-            <a:off x="784072" y="5888846"/>
+            <a:off x="799312" y="5340207"/>
             <a:ext cx="10393680" cy="292388"/>
           </a:xfrm>
           <a:prstGeom prst="rect">
@@ -8821,7 +8669,15 @@
             </a:pPr>
             <a:r>
               <a:rPr dirty="0"/>
-              <a:t>Acknowledgement of AI-Generated Content: AI tools were used to</a:t>
+              <a:t>Acknowledgement of AI</a:t>
+            </a:r>
+            <a:r>
+              <a:rPr lang="en-US" dirty="0"/>
+              <a:t> usage</a:t>
+            </a:r>
+            <a:r>
+              <a:rPr dirty="0"/>
+              <a:t>: AI tools were used to</a:t>
             </a:r>
             <a:r>
               <a:rPr lang="en-US" dirty="0"/>
@@ -12475,7 +12331,7 @@
         <p:spPr>
           <a:xfrm>
             <a:off x="4709160" y="5212080"/>
-            <a:ext cx="2926080" cy="914400"/>
+            <a:ext cx="2926080" cy="523220"/>
           </a:xfrm>
           <a:prstGeom prst="rect">
             <a:avLst/>
@@ -12497,10 +12353,18 @@
               </a:defRPr>
             </a:pPr>
             <a:r>
-              <a:t>Console + file output</a:t>
-            </a:r>
-            <a:br/>
-            <a:r>
+              <a:rPr lang="en-US" dirty="0"/>
+              <a:t>O</a:t>
+            </a:r>
+            <a:r>
+              <a:rPr dirty="0"/>
+              <a:t>utput</a:t>
+            </a:r>
+            <a:br>
+              <a:rPr dirty="0"/>
+            </a:br>
+            <a:r>
+              <a:rPr dirty="0"/>
               <a:t>with comparison tables</a:t>
             </a:r>
           </a:p>
@@ -14182,746 +14046,6 @@
           <a:p>
             <a:pPr algn="ctr"/>
             <a:endParaRPr/>
-          </a:p>
-        </p:txBody>
-      </p:sp>
-      <p:sp>
-        <p:nvSpPr>
-          <p:cNvPr id="5" name="Rounded Rectangle 4"/>
-          <p:cNvSpPr/>
-          <p:nvPr/>
-        </p:nvSpPr>
-        <p:spPr>
-          <a:xfrm>
-            <a:off x="731520" y="1371600"/>
-            <a:ext cx="6400800" cy="3017520"/>
-          </a:xfrm>
-          <a:prstGeom prst="roundRect">
-            <a:avLst>
-              <a:gd name="adj" fmla="val 3000"/>
-            </a:avLst>
-          </a:prstGeom>
-          <a:solidFill>
-            <a:srgbClr val="0A1220"/>
-          </a:solidFill>
-          <a:ln>
-            <a:noFill/>
-          </a:ln>
-        </p:spPr>
-        <p:style>
-          <a:lnRef idx="1">
-            <a:schemeClr val="accent1"/>
-          </a:lnRef>
-          <a:fillRef idx="3">
-            <a:schemeClr val="accent1"/>
-          </a:fillRef>
-          <a:effectRef idx="2">
-            <a:schemeClr val="accent1"/>
-          </a:effectRef>
-          <a:fontRef idx="minor">
-            <a:schemeClr val="lt1"/>
-          </a:fontRef>
-        </p:style>
-        <p:txBody>
-          <a:bodyPr rtlCol="0" anchor="ctr"/>
-          <a:lstStyle/>
-          <a:p>
-            <a:pPr algn="ctr"/>
-            <a:endParaRPr/>
-          </a:p>
-        </p:txBody>
-      </p:sp>
-      <p:sp>
-        <p:nvSpPr>
-          <p:cNvPr id="6" name="Rectangle 5"/>
-          <p:cNvSpPr/>
-          <p:nvPr/>
-        </p:nvSpPr>
-        <p:spPr>
-          <a:xfrm>
-            <a:off x="731520" y="1371600"/>
-            <a:ext cx="6400800" cy="365760"/>
-          </a:xfrm>
-          <a:prstGeom prst="rect">
-            <a:avLst/>
-          </a:prstGeom>
-          <a:solidFill>
-            <a:srgbClr val="1A2A3E"/>
-          </a:solidFill>
-          <a:ln>
-            <a:noFill/>
-          </a:ln>
-        </p:spPr>
-        <p:style>
-          <a:lnRef idx="1">
-            <a:schemeClr val="accent1"/>
-          </a:lnRef>
-          <a:fillRef idx="3">
-            <a:schemeClr val="accent1"/>
-          </a:fillRef>
-          <a:effectRef idx="2">
-            <a:schemeClr val="accent1"/>
-          </a:effectRef>
-          <a:fontRef idx="minor">
-            <a:schemeClr val="lt1"/>
-          </a:fontRef>
-        </p:style>
-        <p:txBody>
-          <a:bodyPr rtlCol="0" anchor="ctr"/>
-          <a:lstStyle/>
-          <a:p>
-            <a:pPr algn="ctr"/>
-            <a:endParaRPr/>
-          </a:p>
-        </p:txBody>
-      </p:sp>
-      <p:sp>
-        <p:nvSpPr>
-          <p:cNvPr id="7" name="TextBox 6"/>
-          <p:cNvSpPr txBox="1"/>
-          <p:nvPr/>
-        </p:nvSpPr>
-        <p:spPr>
-          <a:xfrm>
-            <a:off x="1005840" y="1389888"/>
-            <a:ext cx="4572000" cy="320040"/>
-          </a:xfrm>
-          <a:prstGeom prst="rect">
-            <a:avLst/>
-          </a:prstGeom>
-          <a:noFill/>
-        </p:spPr>
-        <p:txBody>
-          <a:bodyPr wrap="square">
-            <a:spAutoFit/>
-          </a:bodyPr>
-          <a:lstStyle/>
-          <a:p>
-            <a:pPr algn="l">
-              <a:defRPr sz="1200" b="0">
-                <a:solidFill>
-                  <a:srgbClr val="8090A0"/>
-                </a:solidFill>
-                <a:latin typeface="Calibri"/>
-              </a:defRPr>
-            </a:pPr>
-            <a:r>
-              <a:t>Terminal — DeliveryRouteOptimizer</a:t>
-            </a:r>
-          </a:p>
-        </p:txBody>
-      </p:sp>
-      <p:sp>
-        <p:nvSpPr>
-          <p:cNvPr id="8" name="TextBox 7"/>
-          <p:cNvSpPr txBox="1"/>
-          <p:nvPr/>
-        </p:nvSpPr>
-        <p:spPr>
-          <a:xfrm>
-            <a:off x="1005840" y="1828800"/>
-            <a:ext cx="5943600" cy="2286000"/>
-          </a:xfrm>
-          <a:prstGeom prst="rect">
-            <a:avLst/>
-          </a:prstGeom>
-          <a:noFill/>
-        </p:spPr>
-        <p:txBody>
-          <a:bodyPr wrap="square">
-            <a:spAutoFit/>
-          </a:bodyPr>
-          <a:lstStyle/>
-          <a:p>
-            <a:pPr algn="l">
-              <a:defRPr sz="1300" b="0">
-                <a:solidFill>
-                  <a:srgbClr val="60D080"/>
-                </a:solidFill>
-                <a:latin typeface="Courier New"/>
-              </a:defRPr>
-            </a:pPr>
-            <a:r>
-              <a:t>$ java -jar DeliveryRouteOptimizer.jar \</a:t>
-            </a:r>
-            <a:br/>
-            <a:r>
-              <a:t>    --matrix data/distances.csv \</a:t>
-            </a:r>
-            <a:br/>
-            <a:r>
-              <a:t>    --packages data/packages.json \</a:t>
-            </a:r>
-            <a:br/>
-            <a:r>
-              <a:t>    --algorithm all --capacity 50</a:t>
-            </a:r>
-            <a:br/>
-            <a:br/>
-            <a:r>
-              <a:t>[LOG] Reached stop A (123 Main St) at 08:33</a:t>
-            </a:r>
-            <a:br/>
-            <a:r>
-              <a:t>[LOG] Reached stop B (456 Oak Ave) at 09:18</a:t>
-            </a:r>
-            <a:br/>
-            <a:r>
-              <a:t>[LOG] Route complete (2-Opt). Distance: 87.50 km</a:t>
-            </a:r>
-          </a:p>
-        </p:txBody>
-      </p:sp>
-      <p:sp>
-        <p:nvSpPr>
-          <p:cNvPr id="9" name="Rounded Rectangle 8"/>
-          <p:cNvSpPr/>
-          <p:nvPr/>
-        </p:nvSpPr>
-        <p:spPr>
-          <a:xfrm>
-            <a:off x="7498079" y="1371600"/>
-            <a:ext cx="3931920" cy="5029200"/>
-          </a:xfrm>
-          <a:prstGeom prst="roundRect">
-            <a:avLst>
-              <a:gd name="adj" fmla="val 5000"/>
-            </a:avLst>
-          </a:prstGeom>
-          <a:solidFill>
-            <a:srgbClr val="162A43"/>
-          </a:solidFill>
-          <a:ln>
-            <a:noFill/>
-          </a:ln>
-        </p:spPr>
-        <p:style>
-          <a:lnRef idx="1">
-            <a:schemeClr val="accent1"/>
-          </a:lnRef>
-          <a:fillRef idx="3">
-            <a:schemeClr val="accent1"/>
-          </a:fillRef>
-          <a:effectRef idx="2">
-            <a:schemeClr val="accent1"/>
-          </a:effectRef>
-          <a:fontRef idx="minor">
-            <a:schemeClr val="lt1"/>
-          </a:fontRef>
-        </p:style>
-        <p:txBody>
-          <a:bodyPr rtlCol="0" anchor="ctr"/>
-          <a:lstStyle/>
-          <a:p>
-            <a:pPr algn="ctr"/>
-            <a:endParaRPr/>
-          </a:p>
-        </p:txBody>
-      </p:sp>
-      <p:sp>
-        <p:nvSpPr>
-          <p:cNvPr id="10" name="TextBox 9"/>
-          <p:cNvSpPr txBox="1"/>
-          <p:nvPr/>
-        </p:nvSpPr>
-        <p:spPr>
-          <a:xfrm>
-            <a:off x="7498079" y="859536"/>
-            <a:ext cx="3383280" cy="457200"/>
-          </a:xfrm>
-          <a:prstGeom prst="rect">
-            <a:avLst/>
-          </a:prstGeom>
-          <a:noFill/>
-        </p:spPr>
-        <p:txBody>
-          <a:bodyPr wrap="square">
-            <a:spAutoFit/>
-          </a:bodyPr>
-          <a:lstStyle/>
-          <a:p>
-            <a:pPr algn="l">
-              <a:defRPr sz="2000" b="1">
-                <a:solidFill>
-                  <a:srgbClr val="A0D2CE"/>
-                </a:solidFill>
-                <a:latin typeface="Calibri"/>
-              </a:defRPr>
-            </a:pPr>
-            <a:r>
-              <a:rPr dirty="0"/>
-              <a:t>Execution Flow</a:t>
-            </a:r>
-          </a:p>
-        </p:txBody>
-      </p:sp>
-      <p:sp>
-        <p:nvSpPr>
-          <p:cNvPr id="11" name="TextBox 10"/>
-          <p:cNvSpPr txBox="1"/>
-          <p:nvPr/>
-        </p:nvSpPr>
-        <p:spPr>
-          <a:xfrm>
-            <a:off x="7677806" y="1549908"/>
-            <a:ext cx="3383280" cy="4297680"/>
-          </a:xfrm>
-          <a:prstGeom prst="rect">
-            <a:avLst/>
-          </a:prstGeom>
-          <a:noFill/>
-        </p:spPr>
-        <p:txBody>
-          <a:bodyPr wrap="square">
-            <a:spAutoFit/>
-          </a:bodyPr>
-          <a:lstStyle/>
-          <a:p>
-            <a:pPr>
-              <a:spcBef>
-                <a:spcPts val="200"/>
-              </a:spcBef>
-              <a:spcAft>
-                <a:spcPts val="400"/>
-              </a:spcAft>
-              <a:defRPr sz="1300" b="0">
-                <a:solidFill>
-                  <a:srgbClr val="E0EBEE"/>
-                </a:solidFill>
-                <a:latin typeface="Calibri"/>
-              </a:defRPr>
-            </a:pPr>
-            <a:r>
-              <a:rPr dirty="0"/>
-              <a:t>1. Parse CLI arguments</a:t>
-            </a:r>
-          </a:p>
-          <a:p>
-            <a:pPr>
-              <a:spcBef>
-                <a:spcPts val="200"/>
-              </a:spcBef>
-              <a:spcAft>
-                <a:spcPts val="400"/>
-              </a:spcAft>
-              <a:defRPr sz="1300" b="0">
-                <a:solidFill>
-                  <a:srgbClr val="E0EBEE"/>
-                </a:solidFill>
-                <a:latin typeface="Calibri"/>
-              </a:defRPr>
-            </a:pPr>
-            <a:r>
-              <a:rPr dirty="0"/>
-              <a:t>   (matrix, packages, algorithm, capacity)</a:t>
-            </a:r>
-          </a:p>
-          <a:p>
-            <a:pPr>
-              <a:spcBef>
-                <a:spcPts val="200"/>
-              </a:spcBef>
-              <a:spcAft>
-                <a:spcPts val="400"/>
-              </a:spcAft>
-              <a:defRPr sz="1300" b="0">
-                <a:solidFill>
-                  <a:srgbClr val="E0EBEE"/>
-                </a:solidFill>
-                <a:latin typeface="Calibri"/>
-              </a:defRPr>
-            </a:pPr>
-            <a:endParaRPr dirty="0"/>
-          </a:p>
-          <a:p>
-            <a:pPr>
-              <a:spcBef>
-                <a:spcPts val="200"/>
-              </a:spcBef>
-              <a:spcAft>
-                <a:spcPts val="400"/>
-              </a:spcAft>
-              <a:defRPr sz="1300" b="0">
-                <a:solidFill>
-                  <a:srgbClr val="E0EBEE"/>
-                </a:solidFill>
-                <a:latin typeface="Calibri"/>
-              </a:defRPr>
-            </a:pPr>
-            <a:r>
-              <a:rPr dirty="0"/>
-              <a:t>2. Load &amp; validate inputs</a:t>
-            </a:r>
-          </a:p>
-          <a:p>
-            <a:pPr>
-              <a:spcBef>
-                <a:spcPts val="200"/>
-              </a:spcBef>
-              <a:spcAft>
-                <a:spcPts val="400"/>
-              </a:spcAft>
-              <a:defRPr sz="1300" b="0">
-                <a:solidFill>
-                  <a:srgbClr val="E0EBEE"/>
-                </a:solidFill>
-                <a:latin typeface="Calibri"/>
-              </a:defRPr>
-            </a:pPr>
-            <a:r>
-              <a:rPr dirty="0"/>
-              <a:t>   CSV matrix + JSON packages</a:t>
-            </a:r>
-          </a:p>
-          <a:p>
-            <a:pPr>
-              <a:spcBef>
-                <a:spcPts val="200"/>
-              </a:spcBef>
-              <a:spcAft>
-                <a:spcPts val="400"/>
-              </a:spcAft>
-              <a:defRPr sz="1300" b="0">
-                <a:solidFill>
-                  <a:srgbClr val="E0EBEE"/>
-                </a:solidFill>
-                <a:latin typeface="Calibri"/>
-              </a:defRPr>
-            </a:pPr>
-            <a:endParaRPr dirty="0"/>
-          </a:p>
-          <a:p>
-            <a:pPr>
-              <a:spcBef>
-                <a:spcPts val="200"/>
-              </a:spcBef>
-              <a:spcAft>
-                <a:spcPts val="400"/>
-              </a:spcAft>
-              <a:defRPr sz="1300" b="0">
-                <a:solidFill>
-                  <a:srgbClr val="E0EBEE"/>
-                </a:solidFill>
-                <a:latin typeface="Calibri"/>
-              </a:defRPr>
-            </a:pPr>
-            <a:r>
-              <a:rPr dirty="0"/>
-              <a:t>3. Split into trips if capacity exceeded</a:t>
-            </a:r>
-          </a:p>
-          <a:p>
-            <a:pPr>
-              <a:spcBef>
-                <a:spcPts val="200"/>
-              </a:spcBef>
-              <a:spcAft>
-                <a:spcPts val="400"/>
-              </a:spcAft>
-              <a:defRPr sz="1300" b="0">
-                <a:solidFill>
-                  <a:srgbClr val="E0EBEE"/>
-                </a:solidFill>
-                <a:latin typeface="Calibri"/>
-              </a:defRPr>
-            </a:pPr>
-            <a:r>
-              <a:rPr dirty="0"/>
-              <a:t>   Priority-based packing</a:t>
-            </a:r>
-          </a:p>
-          <a:p>
-            <a:pPr>
-              <a:spcBef>
-                <a:spcPts val="200"/>
-              </a:spcBef>
-              <a:spcAft>
-                <a:spcPts val="400"/>
-              </a:spcAft>
-              <a:defRPr sz="1300" b="0">
-                <a:solidFill>
-                  <a:srgbClr val="E0EBEE"/>
-                </a:solidFill>
-                <a:latin typeface="Calibri"/>
-              </a:defRPr>
-            </a:pPr>
-            <a:endParaRPr dirty="0"/>
-          </a:p>
-          <a:p>
-            <a:pPr>
-              <a:spcBef>
-                <a:spcPts val="200"/>
-              </a:spcBef>
-              <a:spcAft>
-                <a:spcPts val="400"/>
-              </a:spcAft>
-              <a:defRPr sz="1300" b="0">
-                <a:solidFill>
-                  <a:srgbClr val="E0EBEE"/>
-                </a:solidFill>
-                <a:latin typeface="Calibri"/>
-              </a:defRPr>
-            </a:pPr>
-            <a:r>
-              <a:rPr dirty="0"/>
-              <a:t>4. Run selected algorithm(s)</a:t>
-            </a:r>
-          </a:p>
-          <a:p>
-            <a:pPr>
-              <a:spcBef>
-                <a:spcPts val="200"/>
-              </a:spcBef>
-              <a:spcAft>
-                <a:spcPts val="400"/>
-              </a:spcAft>
-              <a:defRPr sz="1300" b="0">
-                <a:solidFill>
-                  <a:srgbClr val="E0EBEE"/>
-                </a:solidFill>
-                <a:latin typeface="Calibri"/>
-              </a:defRPr>
-            </a:pPr>
-            <a:r>
-              <a:rPr dirty="0"/>
-              <a:t>   on each trip independently</a:t>
-            </a:r>
-          </a:p>
-          <a:p>
-            <a:pPr>
-              <a:spcBef>
-                <a:spcPts val="200"/>
-              </a:spcBef>
-              <a:spcAft>
-                <a:spcPts val="400"/>
-              </a:spcAft>
-              <a:defRPr sz="1300" b="0">
-                <a:solidFill>
-                  <a:srgbClr val="E0EBEE"/>
-                </a:solidFill>
-                <a:latin typeface="Calibri"/>
-              </a:defRPr>
-            </a:pPr>
-            <a:endParaRPr dirty="0"/>
-          </a:p>
-          <a:p>
-            <a:pPr>
-              <a:spcBef>
-                <a:spcPts val="200"/>
-              </a:spcBef>
-              <a:spcAft>
-                <a:spcPts val="400"/>
-              </a:spcAft>
-              <a:defRPr sz="1300" b="0">
-                <a:solidFill>
-                  <a:srgbClr val="E0EBEE"/>
-                </a:solidFill>
-                <a:latin typeface="Calibri"/>
-              </a:defRPr>
-            </a:pPr>
-            <a:r>
-              <a:rPr dirty="0"/>
-              <a:t>5. Replay route at 40 km/h</a:t>
-            </a:r>
-          </a:p>
-          <a:p>
-            <a:pPr>
-              <a:spcBef>
-                <a:spcPts val="200"/>
-              </a:spcBef>
-              <a:spcAft>
-                <a:spcPts val="400"/>
-              </a:spcAft>
-              <a:defRPr sz="1300" b="0">
-                <a:solidFill>
-                  <a:srgbClr val="E0EBEE"/>
-                </a:solidFill>
-                <a:latin typeface="Calibri"/>
-              </a:defRPr>
-            </a:pPr>
-            <a:r>
-              <a:rPr dirty="0"/>
-              <a:t>   Check constraints via Observers</a:t>
-            </a:r>
-          </a:p>
-          <a:p>
-            <a:pPr>
-              <a:spcBef>
-                <a:spcPts val="200"/>
-              </a:spcBef>
-              <a:spcAft>
-                <a:spcPts val="400"/>
-              </a:spcAft>
-              <a:defRPr sz="1300" b="0">
-                <a:solidFill>
-                  <a:srgbClr val="E0EBEE"/>
-                </a:solidFill>
-                <a:latin typeface="Calibri"/>
-              </a:defRPr>
-            </a:pPr>
-            <a:endParaRPr dirty="0"/>
-          </a:p>
-          <a:p>
-            <a:pPr>
-              <a:spcBef>
-                <a:spcPts val="200"/>
-              </a:spcBef>
-              <a:spcAft>
-                <a:spcPts val="400"/>
-              </a:spcAft>
-              <a:defRPr sz="1300" b="0">
-                <a:solidFill>
-                  <a:srgbClr val="E0EBEE"/>
-                </a:solidFill>
-                <a:latin typeface="Calibri"/>
-              </a:defRPr>
-            </a:pPr>
-            <a:r>
-              <a:rPr dirty="0"/>
-              <a:t>6. Generate reports</a:t>
-            </a:r>
-          </a:p>
-          <a:p>
-            <a:pPr>
-              <a:spcBef>
-                <a:spcPts val="200"/>
-              </a:spcBef>
-              <a:spcAft>
-                <a:spcPts val="400"/>
-              </a:spcAft>
-              <a:defRPr sz="1300" b="0">
-                <a:solidFill>
-                  <a:srgbClr val="E0EBEE"/>
-                </a:solidFill>
-                <a:latin typeface="Calibri"/>
-              </a:defRPr>
-            </a:pPr>
-            <a:r>
-              <a:rPr dirty="0"/>
-              <a:t>   Console + file output</a:t>
-            </a:r>
-          </a:p>
-        </p:txBody>
-      </p:sp>
-      <p:sp>
-        <p:nvSpPr>
-          <p:cNvPr id="12" name="Rounded Rectangle 11"/>
-          <p:cNvSpPr/>
-          <p:nvPr/>
-        </p:nvSpPr>
-        <p:spPr>
-          <a:xfrm>
-            <a:off x="731520" y="4663440"/>
-            <a:ext cx="6400800" cy="1645920"/>
-          </a:xfrm>
-          <a:prstGeom prst="roundRect">
-            <a:avLst>
-              <a:gd name="adj" fmla="val 4000"/>
-            </a:avLst>
-          </a:prstGeom>
-          <a:solidFill>
-            <a:srgbClr val="162A43"/>
-          </a:solidFill>
-          <a:ln>
-            <a:noFill/>
-          </a:ln>
-        </p:spPr>
-        <p:style>
-          <a:lnRef idx="1">
-            <a:schemeClr val="accent1"/>
-          </a:lnRef>
-          <a:fillRef idx="3">
-            <a:schemeClr val="accent1"/>
-          </a:fillRef>
-          <a:effectRef idx="2">
-            <a:schemeClr val="accent1"/>
-          </a:effectRef>
-          <a:fontRef idx="minor">
-            <a:schemeClr val="lt1"/>
-          </a:fontRef>
-        </p:style>
-        <p:txBody>
-          <a:bodyPr rtlCol="0" anchor="ctr"/>
-          <a:lstStyle/>
-          <a:p>
-            <a:pPr algn="ctr"/>
-            <a:endParaRPr/>
-          </a:p>
-        </p:txBody>
-      </p:sp>
-      <p:sp>
-        <p:nvSpPr>
-          <p:cNvPr id="13" name="TextBox 12"/>
-          <p:cNvSpPr txBox="1"/>
-          <p:nvPr/>
-        </p:nvSpPr>
-        <p:spPr>
-          <a:xfrm>
-            <a:off x="1005840" y="4754880"/>
-            <a:ext cx="5943600" cy="274320"/>
-          </a:xfrm>
-          <a:prstGeom prst="rect">
-            <a:avLst/>
-          </a:prstGeom>
-          <a:noFill/>
-        </p:spPr>
-        <p:txBody>
-          <a:bodyPr wrap="square">
-            <a:spAutoFit/>
-          </a:bodyPr>
-          <a:lstStyle/>
-          <a:p>
-            <a:pPr algn="l">
-              <a:defRPr sz="1600" b="1">
-                <a:solidFill>
-                  <a:srgbClr val="A0D2CE"/>
-                </a:solidFill>
-                <a:latin typeface="Calibri"/>
-              </a:defRPr>
-            </a:pPr>
-            <a:r>
-              <a:t>Sample Output</a:t>
-            </a:r>
-          </a:p>
-        </p:txBody>
-      </p:sp>
-      <p:sp>
-        <p:nvSpPr>
-          <p:cNvPr id="14" name="TextBox 13"/>
-          <p:cNvSpPr txBox="1"/>
-          <p:nvPr/>
-        </p:nvSpPr>
-        <p:spPr>
-          <a:xfrm>
-            <a:off x="1005840" y="5120640"/>
-            <a:ext cx="5943600" cy="1097280"/>
-          </a:xfrm>
-          <a:prstGeom prst="rect">
-            <a:avLst/>
-          </a:prstGeom>
-          <a:noFill/>
-        </p:spPr>
-        <p:txBody>
-          <a:bodyPr wrap="square">
-            <a:spAutoFit/>
-          </a:bodyPr>
-          <a:lstStyle/>
-          <a:p>
-            <a:pPr algn="l">
-              <a:defRPr sz="1500" b="0">
-                <a:solidFill>
-                  <a:srgbClr val="E0EBEE"/>
-                </a:solidFill>
-                <a:latin typeface="Calibri"/>
-              </a:defRPr>
-            </a:pPr>
-            <a:r>
-              <a:t>Route:  Depot → A → B → D → C → E → Depot</a:t>
-            </a:r>
-            <a:br/>
-            <a:r>
-              <a:t>Distance: 87.50 km  |  Time: 131 min  |  Violations: None</a:t>
-            </a:r>
           </a:p>
         </p:txBody>
       </p:sp>
@@ -15207,7 +14331,7 @@
         </p:blipFill>
         <p:spPr>
           <a:xfrm>
-            <a:off x="2783604" y="693895"/>
+            <a:off x="2666646" y="713048"/>
             <a:ext cx="8873756" cy="6311458"/>
           </a:xfrm>
           <a:prstGeom prst="rect">
